--- a/poster/Poster_Aspasia_Lavazou.pptx
+++ b/poster/Poster_Aspasia_Lavazou.pptx
@@ -244,7 +244,7 @@
           <a:p>
             <a:fld id="{8E34CE9C-792F-D946-8C32-48C63AD787B7}" type="datetimeFigureOut">
               <a:rPr lang="en-US" smtClean="0"/>
-              <a:t>6/1/26</a:t>
+              <a:t>6/4/26</a:t>
             </a:fld>
             <a:endParaRPr lang="en-US"/>
           </a:p>
@@ -421,7 +421,7 @@
           <a:p>
             <a:fld id="{E2768A17-F5B0-9947-A68E-E504F8DDB801}" type="datetimeFigureOut">
               <a:rPr lang="en-US" smtClean="0"/>
-              <a:t>6/1/26</a:t>
+              <a:t>6/4/26</a:t>
             </a:fld>
             <a:endParaRPr lang="en-US"/>
           </a:p>
@@ -1049,7 +1049,7 @@
           <a:p>
             <a:fld id="{0D874E1D-646D-7145-8AC9-5F33025D44BF}" type="datetimeFigureOut">
               <a:rPr lang="en-US" smtClean="0"/>
-              <a:t>6/1/26</a:t>
+              <a:t>6/4/26</a:t>
             </a:fld>
             <a:endParaRPr lang="en-US"/>
           </a:p>
@@ -1219,7 +1219,7 @@
           <a:p>
             <a:fld id="{0D874E1D-646D-7145-8AC9-5F33025D44BF}" type="datetimeFigureOut">
               <a:rPr lang="en-US" smtClean="0"/>
-              <a:t>6/1/26</a:t>
+              <a:t>6/4/26</a:t>
             </a:fld>
             <a:endParaRPr lang="en-US"/>
           </a:p>
@@ -1399,7 +1399,7 @@
           <a:p>
             <a:fld id="{0D874E1D-646D-7145-8AC9-5F33025D44BF}" type="datetimeFigureOut">
               <a:rPr lang="en-US" smtClean="0"/>
-              <a:t>6/1/26</a:t>
+              <a:t>6/4/26</a:t>
             </a:fld>
             <a:endParaRPr lang="en-US"/>
           </a:p>
@@ -1569,7 +1569,7 @@
           <a:p>
             <a:fld id="{0D874E1D-646D-7145-8AC9-5F33025D44BF}" type="datetimeFigureOut">
               <a:rPr lang="en-US" smtClean="0"/>
-              <a:t>6/1/26</a:t>
+              <a:t>6/4/26</a:t>
             </a:fld>
             <a:endParaRPr lang="en-US"/>
           </a:p>
@@ -1815,7 +1815,7 @@
           <a:p>
             <a:fld id="{0D874E1D-646D-7145-8AC9-5F33025D44BF}" type="datetimeFigureOut">
               <a:rPr lang="en-US" smtClean="0"/>
-              <a:t>6/1/26</a:t>
+              <a:t>6/4/26</a:t>
             </a:fld>
             <a:endParaRPr lang="en-US"/>
           </a:p>
@@ -2047,7 +2047,7 @@
           <a:p>
             <a:fld id="{0D874E1D-646D-7145-8AC9-5F33025D44BF}" type="datetimeFigureOut">
               <a:rPr lang="en-US" smtClean="0"/>
-              <a:t>6/1/26</a:t>
+              <a:t>6/4/26</a:t>
             </a:fld>
             <a:endParaRPr lang="en-US"/>
           </a:p>
@@ -2414,7 +2414,7 @@
           <a:p>
             <a:fld id="{0D874E1D-646D-7145-8AC9-5F33025D44BF}" type="datetimeFigureOut">
               <a:rPr lang="en-US" smtClean="0"/>
-              <a:t>6/1/26</a:t>
+              <a:t>6/4/26</a:t>
             </a:fld>
             <a:endParaRPr lang="en-US"/>
           </a:p>
@@ -2532,7 +2532,7 @@
           <a:p>
             <a:fld id="{0D874E1D-646D-7145-8AC9-5F33025D44BF}" type="datetimeFigureOut">
               <a:rPr lang="en-US" smtClean="0"/>
-              <a:t>6/1/26</a:t>
+              <a:t>6/4/26</a:t>
             </a:fld>
             <a:endParaRPr lang="en-US"/>
           </a:p>
@@ -2627,7 +2627,7 @@
           <a:p>
             <a:fld id="{0D874E1D-646D-7145-8AC9-5F33025D44BF}" type="datetimeFigureOut">
               <a:rPr lang="en-US" smtClean="0"/>
-              <a:t>6/1/26</a:t>
+              <a:t>6/4/26</a:t>
             </a:fld>
             <a:endParaRPr lang="en-US"/>
           </a:p>
@@ -2904,7 +2904,7 @@
           <a:p>
             <a:fld id="{0D874E1D-646D-7145-8AC9-5F33025D44BF}" type="datetimeFigureOut">
               <a:rPr lang="en-US" smtClean="0"/>
-              <a:t>6/1/26</a:t>
+              <a:t>6/4/26</a:t>
             </a:fld>
             <a:endParaRPr lang="en-US"/>
           </a:p>
@@ -3161,7 +3161,7 @@
           <a:p>
             <a:fld id="{0D874E1D-646D-7145-8AC9-5F33025D44BF}" type="datetimeFigureOut">
               <a:rPr lang="en-US" smtClean="0"/>
-              <a:t>6/1/26</a:t>
+              <a:t>6/4/26</a:t>
             </a:fld>
             <a:endParaRPr lang="en-US"/>
           </a:p>
@@ -3374,7 +3374,7 @@
           <a:p>
             <a:fld id="{0D874E1D-646D-7145-8AC9-5F33025D44BF}" type="datetimeFigureOut">
               <a:rPr lang="en-US" smtClean="0"/>
-              <a:t>6/1/26</a:t>
+              <a:t>6/4/26</a:t>
             </a:fld>
             <a:endParaRPr lang="en-US"/>
           </a:p>
@@ -9364,7 +9364,7 @@
         </p:blipFill>
         <p:spPr bwMode="auto">
           <a:xfrm>
-            <a:off x="26031973" y="807342"/>
+            <a:off x="26099544" y="643756"/>
             <a:ext cx="3313493" cy="901270"/>
           </a:xfrm>
           <a:prstGeom prst="rect">
@@ -9458,7 +9458,7 @@
         </p:blipFill>
         <p:spPr bwMode="auto">
           <a:xfrm>
-            <a:off x="16525160" y="593565"/>
+            <a:off x="16510116" y="807342"/>
             <a:ext cx="4147188" cy="1282700"/>
           </a:xfrm>
           <a:prstGeom prst="rect">
@@ -9476,6 +9476,41 @@
           </a:extLst>
         </p:spPr>
       </p:pic>
+      <p:sp>
+        <p:nvSpPr>
+          <p:cNvPr id="6" name="TextBox 5">
+            <a:extLst>
+              <a:ext uri="{FF2B5EF4-FFF2-40B4-BE49-F238E27FC236}">
+                <a16:creationId xmlns:a16="http://schemas.microsoft.com/office/drawing/2014/main" id="{905DC620-94F7-FBDD-07D9-50AE303E5D98}"/>
+              </a:ext>
+            </a:extLst>
+          </p:cNvPr>
+          <p:cNvSpPr txBox="1"/>
+          <p:nvPr/>
+        </p:nvSpPr>
+        <p:spPr>
+          <a:xfrm>
+            <a:off x="7578089" y="21212294"/>
+            <a:ext cx="18959029" cy="369332"/>
+          </a:xfrm>
+          <a:prstGeom prst="rect">
+            <a:avLst/>
+          </a:prstGeom>
+          <a:noFill/>
+        </p:spPr>
+        <p:txBody>
+          <a:bodyPr wrap="square">
+            <a:spAutoFit/>
+          </a:bodyPr>
+          <a:lstStyle/>
+          <a:p>
+            <a:r>
+              <a:rPr lang="en-US" dirty="0"/>
+              <a:t>5354563174436491</a:t>
+            </a:r>
+          </a:p>
+        </p:txBody>
+      </p:sp>
     </p:spTree>
     <p:extLst>
       <p:ext uri="{BB962C8B-B14F-4D97-AF65-F5344CB8AC3E}">
